--- a/ai-case-library/research/ventures/grid-idea-island.pptx
+++ b/ai-case-library/research/ventures/grid-idea-island.pptx
@@ -509,7 +509,7 @@
           <a:p>
             <a:r>
               <a:rPr lang="en-US" dirty="0"/>
-              <a:t>Самая горячая тема года: дата-центры идут в собственную генерацию. Честно: это тяжёлый инжиниринг, оборудование в дефиците не меньше инженеров.</a:t>
+              <a:t>Проверено 02.09.2026 (ic16-1…3): тренд реален (25–36% новых мощностей ЦОД США до 2030 — BTM), но работает ~2 ГВт из ~90 заявленных; «за год» не защищается — 24–36 мес без зарезервированных слотов. Форма — мост, не остров.</a:t>
             </a:r>
             <a:endParaRPr lang="en-US" dirty="0"/>
           </a:p>
@@ -597,7 +597,7 @@
           <a:p>
             <a:r>
               <a:rPr lang="en-US" dirty="0"/>
-              <a:t>GE Vernova: резервирования турбин принимаются на 2031, бэклог 116 ГВт (отчётность II кв. 2026). Не приписывать конкретные дата-центры без источника.</a:t>
+              <a:t>Источники — ic16-1 (Cleanview, Enverus, BNEF, проекты xAI/Crusoe/Oracle/Microsoft), ic16-2 (бэклоги GE Vernova 116 ГВт, Siemens 69, Mitsubishi 35; Wärtsilä слоты 2027–2028).</a:t>
             </a:r>
             <a:endParaRPr lang="en-US" dirty="0"/>
           </a:p>
@@ -773,7 +773,7 @@
           <a:p>
             <a:r>
               <a:rPr lang="en-US" dirty="0"/>
-              <a:t>Оборудование: тяжёлые турбины 30+ мес — по бэклогу GE Vernova; аэродеривативные быстрее — допущение, проверить у поставщиков.</a:t>
+              <a:t>ic16-2: GE Vernova слоты на 2031, аэродеривативы 2–3 года, Wärtsilä слоты 2027–2028, Cat бэклог 72 млрд $, трансформатор ВН 128–144 недели, Bloom 55–90 дней на площадке.</a:t>
             </a:r>
             <a:endParaRPr lang="en-US" dirty="0"/>
           </a:p>
@@ -861,7 +861,7 @@
           <a:p>
             <a:r>
               <a:rPr lang="en-US" dirty="0"/>
-              <a:t>Не называть гиперскейлеров. Цена — доля CAPEX проектирования, допущение.</a:t>
+              <a:t>ic16-3: газ КСА 2,15 → ~2,4–2,6 $/MMBtu (2026); тариф SEC для ЦОД 4,8 ¢/кВтч; своя генерация ≈5–6,5 ¢ (допущение) — выигрыш только по времени. Corporate PPA/wheeling в Заливе запрещены.</a:t>
             </a:r>
             <a:endParaRPr lang="en-US" dirty="0"/>
           </a:p>
@@ -1531,7 +1531,7 @@
                 <a:ea typeface="Courier New" pitchFamily="34" charset="-122"/>
                 <a:cs typeface="Courier New" pitchFamily="34" charset="-120"/>
               </a:rPr>
-              <a:t>ОКЕАН ТЕХ · ЭНЕРГООСТРОВ</a:t>
+              <a:t>ОКЕАН ТЕХ · МОСТ</a:t>
             </a:r>
             <a:endParaRPr lang="en-US" sz="1000" dirty="0"/>
           </a:p>
@@ -1609,7 +1609,7 @@
                 <a:ea typeface="Arial" pitchFamily="34" charset="-122"/>
                 <a:cs typeface="Arial" pitchFamily="34" charset="-120"/>
               </a:rPr>
-              <a:t>ИИ-энергетик проектирует дата-центру собственную электростанцию — газ, батареи, солнце — и подключение к сети как резерв. Первый мегаватт через год, а не через пять.</a:t>
+              <a:t>ИИ-энергетик проектирует дата-центру мост: собственная генерация на железе, которое реально поставят, — газопоршневые модули, топливные элементы, батареи, солнце — пока сеть стоит в очереди. Первый мегаватт через два года, а не через пять.</a:t>
             </a:r>
             <a:endParaRPr lang="en-US" sz="1800" dirty="0"/>
           </a:p>
@@ -1648,7 +1648,7 @@
                 <a:ea typeface="Arial" pitchFamily="34" charset="-122"/>
                 <a:cs typeface="Arial" pitchFamily="34" charset="-120"/>
               </a:rPr>
-              <a:t>Мы отключаем дата-центры от очереди. Электричество — новая нефть, и мы бурим скважину прямо на площадке.</a:t>
+              <a:t>Мы не ждём сеть — мы строим мост. Электричество — новая нефть, и мы бурим скважину прямо на площадке.</a:t>
             </a:r>
             <a:endParaRPr lang="en-US" sz="1600" dirty="0"/>
           </a:p>
@@ -1878,7 +1878,7 @@
                 <a:ea typeface="Arial" pitchFamily="34" charset="-122"/>
                 <a:cs typeface="Arial" pitchFamily="34" charset="-120"/>
               </a:rPr>
-              <a:t>Дата-центр ждёт сеть годами, а без электричества серверы — металлолом. Собственная генерация решает очередь, но каждый такой проект — уникальный, а инженеров-энергетиков на всех не хватает.</a:t>
+              <a:t>Дата-центр ждёт сеть годами, а без электричества серверы — металлолом. Рынок уже пошёл в собственную генерацию — но из заявленных гигаватт работают единицы: упёрлись в железо, газ и разрешения.</a:t>
             </a:r>
             <a:endParaRPr lang="en-US" sz="1600" dirty="0"/>
           </a:p>
@@ -2088,7 +2088,7 @@
                 <a:ea typeface="Arial" pitchFamily="34" charset="-122"/>
                 <a:cs typeface="Arial" pitchFamily="34" charset="-120"/>
               </a:rPr>
-              <a:t>2031</a:t>
+              <a:t>2 из 90</a:t>
             </a:r>
             <a:endParaRPr lang="en-US" sz="4400" dirty="0"/>
           </a:p>
@@ -2127,7 +2127,7 @@
                 <a:ea typeface="Arial" pitchFamily="34" charset="-122"/>
                 <a:cs typeface="Arial" pitchFamily="34" charset="-120"/>
               </a:rPr>
-              <a:t>год, до которого расписаны газовые турбины GE Vernova: бэклог 116 ГВт — рынок уже пошёл в собственную генерацию</a:t>
+              <a:t>гигаватт: столько собственной генерации ЦОД в США реально работает из заявленных (Cleanview, 2026). Тяжёлые турбины расписаны до 2031</a:t>
             </a:r>
             <a:endParaRPr lang="en-US" sz="1300" dirty="0"/>
           </a:p>
@@ -2193,7 +2193,7 @@
                 <a:ea typeface="Arial" pitchFamily="34" charset="-122"/>
                 <a:cs typeface="Arial" pitchFamily="34" charset="-120"/>
               </a:rPr>
-              <a:t>160+</a:t>
+              <a:t>25–36%</a:t>
             </a:r>
             <a:endParaRPr lang="en-US" sz="4400" dirty="0"/>
           </a:p>
@@ -2232,7 +2232,7 @@
                 <a:ea typeface="Arial" pitchFamily="34" charset="-122"/>
                 <a:cs typeface="Arial" pitchFamily="34" charset="-120"/>
               </a:rPr>
-              <a:t>недель ожидания трансформатора; 89% компаний, строящих сети, не могут найти инженеров</a:t>
+              <a:t>новых мощностей дата-центров США до 2030 планируются с собственной генерацией (Enverus, BNEF). Oracle, Microsoft, Meta, xAI уже законтрактовали гигаватты</a:t>
             </a:r>
             <a:endParaRPr lang="en-US" sz="1300" dirty="0"/>
           </a:p>
@@ -2274,7 +2274,7 @@
                 <a:ea typeface="Arial" pitchFamily="34" charset="-122"/>
                 <a:cs typeface="Arial" pitchFamily="34" charset="-120"/>
               </a:rPr>
-              <a:t>Собственная электростанция дата-центра — это одновременно энергетика, сеть, экология и закупки оборудования, у которого свои очереди. Сегодня это делают вручную, дорого и по-разному в каждом проекте; девелопер узнаёт реальный срок, когда деньги уже потрачены.</a:t>
+              <a:t>Собственная электростанция — это сразу энергетика, сеть, экология, газ и закупки оборудования, у которого свои очереди: тяжёлые турбины — 2031, аэродеривативы — 2–3 года, поршневые — слоты 2027–2028. Кто ставит турбины без разрешений, получает иски (xAI — в двух штатах). Девелопер узнаёт реальный срок, когда деньги уже потрачены.</a:t>
             </a:r>
             <a:endParaRPr lang="en-US" sz="1350" dirty="0"/>
           </a:p>
@@ -2316,7 +2316,7 @@
                 <a:ea typeface="Arial" pitchFamily="34" charset="-122"/>
                 <a:cs typeface="Arial" pitchFamily="34" charset="-120"/>
               </a:rPr>
-              <a:t>Почему сейчас: спрос дата-центров на электричество удваивается к 2030 (IEA); турбины и трансформаторы расписаны на годы; за инженеров-энергетиков платят миллиарды (WSP → POWER Engineers, 1,78 млрд $). Тот, кто умеет спроектировать энергоостров под реальные сроки поставки, продаёт время.</a:t>
+              <a:t>Почему сейчас: спрос дата-центров на электричество удваивается к 2030 (IEA); гигаваттные контракты на собственную генерацию подписаны в 2025–2026, а свободные слоты на железо тают. ИИ-конфигуратора, который собирает мост под то, что реально поставят, на рынке нет — ближайшие стартапы (GridFree AI, CleanAI) только на seed-стадии. Тот, кто честно считает срок, продаёт время.</a:t>
             </a:r>
             <a:endParaRPr lang="en-US" sz="1350" dirty="0"/>
           </a:p>
@@ -2507,7 +2507,7 @@
                 <a:ea typeface="Arial" pitchFamily="34" charset="-122"/>
                 <a:cs typeface="Arial" pitchFamily="34" charset="-120"/>
               </a:rPr>
-              <a:t>ИИ-энергетик: площадка, нагрузка и срок на входе — конфигурация энергоострова, проект и план поставок на выходе.</a:t>
+              <a:t>ИИ-энергетик: площадка, нагрузка и срок на входе — конфигурация моста под доступное железо, газовая аллокация, проект и план поставок на выходе.</a:t>
             </a:r>
             <a:endParaRPr lang="en-US" sz="1600" dirty="0"/>
           </a:p>
@@ -2609,7 +2609,7 @@
                 <a:ea typeface="Arial" pitchFamily="34" charset="-122"/>
                 <a:cs typeface="Arial" pitchFamily="34" charset="-120"/>
               </a:rPr>
-              <a:t>Конфигуратор энергоострова</a:t>
+              <a:t>Конфигуратор моста</a:t>
             </a:r>
             <a:endParaRPr lang="en-US" sz="1400" dirty="0"/>
           </a:p>
@@ -2648,7 +2648,7 @@
                 <a:ea typeface="Arial" pitchFamily="34" charset="-122"/>
                 <a:cs typeface="Arial" pitchFamily="34" charset="-120"/>
               </a:rPr>
-              <a:t>Подбирает газ, батареи, солнце и резерв сети под профиль нагрузки, нормы страны и — главное — под реальные сроки поставки оборудования. Показывает, когда будет первый мегаватт.</a:t>
+              <a:t>Подбирает поршневые модули, топливные элементы, батареи и солнце под профиль нагрузки, нормы страны и реальные слоты поставки. Сеть — как база, мост — пока сеть в очереди. Показывает честный срок.</a:t>
             </a:r>
             <a:endParaRPr lang="en-US" sz="1200" dirty="0"/>
           </a:p>
@@ -2687,7 +2687,7 @@
                 <a:ea typeface="Arial" pitchFamily="34" charset="-122"/>
                 <a:cs typeface="Arial" pitchFamily="34" charset="-120"/>
               </a:rPr>
-              <a:t>Проектировщик</a:t>
+              <a:t>Проектировщик и разрешения</a:t>
             </a:r>
             <a:endParaRPr lang="en-US" sz="1400" dirty="0"/>
           </a:p>
@@ -2726,7 +2726,7 @@
                 <a:ea typeface="Arial" pitchFamily="34" charset="-122"/>
                 <a:cs typeface="Arial" pitchFamily="34" charset="-120"/>
               </a:rPr>
-              <a:t>От выбранной конфигурации до пакета проекта и разрешений под подпись инженера — за недели.</a:t>
+              <a:t>От конфигурации до пакета проекта, заявки на газ и разрешений под подпись инженера — за недели. Без турбин «сначала поставим, потом оформим».</a:t>
             </a:r>
             <a:endParaRPr lang="en-US" sz="1200" dirty="0"/>
           </a:p>
@@ -3034,7 +3034,7 @@
                 <a:ea typeface="Arial" pitchFamily="34" charset="-122"/>
                 <a:cs typeface="Arial" pitchFamily="34" charset="-120"/>
               </a:rPr>
-              <a:t>Принцип: оборудование в дефиците так же, как инженеры, — поэтому проектируем под то, что реально поставят.</a:t>
+              <a:t>Принцип: оборудование, газ и разрешения в дефиците так же, как инженеры, — поэтому проектируем под то, что реально поставят, и подаём заявки в день ноль.</a:t>
             </a:r>
             <a:endParaRPr lang="en-US" sz="1600" dirty="0"/>
           </a:p>
@@ -3322,7 +3322,7 @@
                 <a:ea typeface="Arial" pitchFamily="34" charset="-122"/>
                 <a:cs typeface="Arial" pitchFamily="34" charset="-120"/>
               </a:rPr>
-              <a:t>Подбор острова</a:t>
+              <a:t>Подбор моста</a:t>
             </a:r>
             <a:endParaRPr lang="en-US" sz="1600" dirty="0"/>
           </a:p>
@@ -3361,7 +3361,7 @@
                 <a:ea typeface="Arial" pitchFamily="34" charset="-122"/>
                 <a:cs typeface="Arial" pitchFamily="34" charset="-120"/>
               </a:rPr>
-              <a:t>Перебирает конфигурации с учётом очередей на турбины и трансформаторы; выбирает по сроку до энергии.</a:t>
+              <a:t>Перебирает конфигурации по слотам у производителей (поршни 2027–28, топливные элементы — месяцы) и очередям на трансформаторы; выбирает по сроку до энергии.</a:t>
             </a:r>
             <a:endParaRPr lang="en-US" sz="1250" dirty="0"/>
           </a:p>
@@ -3466,7 +3466,7 @@
                 <a:ea typeface="Arial" pitchFamily="34" charset="-122"/>
                 <a:cs typeface="Arial" pitchFamily="34" charset="-120"/>
               </a:rPr>
-              <a:t>Проект</a:t>
+              <a:t>Проект и заявки</a:t>
             </a:r>
             <a:endParaRPr lang="en-US" sz="1600" dirty="0"/>
           </a:p>
@@ -3505,7 +3505,7 @@
                 <a:ea typeface="Arial" pitchFamily="34" charset="-122"/>
                 <a:cs typeface="Arial" pitchFamily="34" charset="-120"/>
               </a:rPr>
-              <a:t>Пакет проекта и разрешения под подпись инженера; параллельно — заявка в сеть на резерв.</a:t>
+              <a:t>Пакет проекта, заявка на аллокацию газа, разрешения по выбросам — под подпись инженера; параллельно заявка в сеть.</a:t>
             </a:r>
             <a:endParaRPr lang="en-US" sz="1250" dirty="0"/>
           </a:p>
@@ -3733,7 +3733,7 @@
                 <a:ea typeface="Arial" pitchFamily="34" charset="-122"/>
                 <a:cs typeface="Arial" pitchFamily="34" charset="-120"/>
               </a:rPr>
-              <a:t>Честно о границах: мы не строим и не покупаем турбины. Мы проектируем и управляем; железо и стройка — у партнёров и за деньги клиента. Срок 14 месяцев на экране — допущение до первого проекта.</a:t>
+              <a:t>Честно о границах: без заранее зарезервированных слотов срок — 24–36 месяцев, не год; 90 дней умеет только Bloom, но по 3–4 тыс. $/кВт и с 2,8 ГВт Oracle в очереди. Мы не строим и не покупаем железо — проектируем, ведём заявки и управляем; стройка у партнёров и за деньги клиента.</a:t>
             </a:r>
             <a:endParaRPr lang="en-US" sz="1300" dirty="0"/>
           </a:p>
@@ -4437,7 +4437,7 @@
                 <a:ea typeface="Arial" pitchFamily="34" charset="-122"/>
                 <a:cs typeface="Arial" pitchFamily="34" charset="-120"/>
               </a:rPr>
-              <a:t>Рынок: спрос дата-центров на электричество удваивается к 2030; только в Саудовской Аравии — 15 млрд $ контрактов на сети и подстанции за год. Каждый крупный дата-центр без собственной генерации — потенциальный проект.</a:t>
+              <a:t>Рынок: 25–36% новых мощностей ЦОД США до 2030 — с собственной генерацией (Enverus: 31,6 ГВт генерации, из них 29,6 — газ); в Заливе ЦОД строят гибриды — сеть плюс солнце, батареи и газовый резерв (DataVolt/NEOM 1,5 ГВт, Khazna). Продаём не киловатт-часы дешевле, а месяцы раньше: на регулируемом газе Залива своя генерация лишь равна тарифу сети.</a:t>
             </a:r>
             <a:endParaRPr lang="en-US" sz="1300" dirty="0"/>
           </a:p>
@@ -4479,7 +4479,7 @@
                 <a:ea typeface="Arial" pitchFamily="34" charset="-122"/>
                 <a:cs typeface="Arial" pitchFamily="34" charset="-120"/>
               </a:rPr>
-              <a:t>Где: Персидский залив первым — там есть газ, там строят больше всего, и туда пускают команду из России. США и Европа — позже и через партнёров.</a:t>
+              <a:t>Где: Персидский залив — своя генерация законна (лицензия SERA в КСА, Self-Supply Licence в Абу-Даби), ворота — аллокация газа Минэнерго/Aramco; там строят больше всего, и туда пускают команду из России. США — самый большой рынок, но позже и через партнёров.</a:t>
             </a:r>
             <a:endParaRPr lang="en-US" sz="1300" dirty="0"/>
           </a:p>
@@ -5252,7 +5252,7 @@
                 <a:ea typeface="Arial" pitchFamily="34" charset="-122"/>
                 <a:cs typeface="Arial" pitchFamily="34" charset="-120"/>
               </a:rPr>
-              <a:t>Почему сейчас: турбины расписаны до 2031, трансформаторы — на три года вперёд; гиганты только начали нанимать менеджеров по ИИ (Black &amp; Veatch, август 2026); стартапы ИИ-инжиниринга для дата-центров появились этим летом (Marengo, Vela — YC 2026). Никто не проектирует энергоострова под реальные очереди на железо.</a:t>
+              <a:t>Почему сейчас: слоты на железо тают (Wärtsilä — переговоры уходят в 2029), гиганты только начали нанимать менеджеров по ИИ (Black &amp; Veatch, август 2026), ИИ-конфигураторы собственной генерации — на seed-стадии (GridFree AI 5 млн $, CleanAI). Никто не проектирует мост под реальные очереди на железо, газ и разрешения.</a:t>
             </a:r>
             <a:endParaRPr lang="en-US" sz="1300" dirty="0"/>
           </a:p>
@@ -5485,7 +5485,7 @@
                 <a:ea typeface="Arial" pitchFamily="34" charset="-122"/>
                 <a:cs typeface="Arial" pitchFamily="34" charset="-120"/>
               </a:rPr>
-              <a:t>10 млн $ на прототип за 18 месяцев — конфигуратор, проектировщик, первый спроектированный энергоостров.</a:t>
+              <a:t>10 млн $ на прототип за 18 месяцев — конфигуратор под реальные слоты, проектировщик, первый спроектированный мост.</a:t>
             </a:r>
             <a:endParaRPr lang="en-US" sz="1600" dirty="0"/>
           </a:p>
@@ -5812,7 +5812,7 @@
                 <a:ea typeface="Arial" pitchFamily="34" charset="-122"/>
                 <a:cs typeface="Arial" pitchFamily="34" charset="-120"/>
               </a:rPr>
-              <a:t>Пакет проекта до подписи инженера-партнёра; первый оплаченный проект энергоострова для девелопера; заявка в сеть на резерв.</a:t>
+              <a:t>Пакет проекта до подписи инженера-партнёра; первый оплаченный проект моста для девелопера; заявки на газ и в сеть поданы.</a:t>
             </a:r>
             <a:endParaRPr lang="en-US" sz="1250" dirty="0"/>
           </a:p>
@@ -5956,7 +5956,7 @@
                 <a:ea typeface="Arial" pitchFamily="34" charset="-122"/>
                 <a:cs typeface="Arial" pitchFamily="34" charset="-120"/>
               </a:rPr>
-              <a:t>Надзор за стройкой первого острова партнёром-EPC; ИИ-диспетчер на первом объекте; вторая страна.</a:t>
+              <a:t>Надзор за стройкой первого моста партнёром-EPC; ИИ-диспетчер на первом объекте; вторая страна.</a:t>
             </a:r>
             <a:endParaRPr lang="en-US" sz="1250" dirty="0"/>
           </a:p>
@@ -6079,7 +6079,7 @@
                 <a:ea typeface="Arial" pitchFamily="34" charset="-122"/>
                 <a:cs typeface="Arial" pitchFamily="34" charset="-120"/>
               </a:rPr>
-              <a:t>Порог после первого транша — конфигурация, которую подтвердит поставщик оборудования и инженер с лицензией. Если нет, вы узнаете это первым.</a:t>
+              <a:t>Порог после первого транша — конфигурация, под которую производитель подтвердил слот, а инженер с лицензией — проект. Если нет, вы узнаете это первым.</a:t>
             </a:r>
             <a:endParaRPr lang="en-US" sz="1400" dirty="0"/>
           </a:p>
@@ -6433,7 +6433,7 @@
                 <a:ea typeface="Arial" pitchFamily="34" charset="-122"/>
                 <a:cs typeface="Arial" pitchFamily="34" charset="-120"/>
               </a:rPr>
-              <a:t>GE Vernova — бэклог 116 ГВт, резервирования на 2031 (отчётность II кв. 2026). Marengo, Vela — YC 2026. Сроки поставки турбин по типам — допущение, проверить у поставщиков.</a:t>
+              <a:t>Cleanview 2026: ~2 ГВт работает из ~90 заявленных; Enverus 11.08.2026: 22,5 ГВт BTM-спроса 2026–2030 (~36%); BNEF 18.08.2026: 126 ГВт заявлено. GE Vernova — 116 ГВт, слоты на 2031; Siemens 69 ГВт; Wärtsilä — слоты 2027–2028; Bloom — 55–90 дней, Oracle до 2,8 ГВт. КСА: SERA лицензия, газ 2,15 $/MMBtu (2025), тариф SEC для ЦОД 18 халал; DoE Abu Dhabi Self-Supply Licence (Khazna). Отчёты ic16-1…3.</a:t>
             </a:r>
             <a:endParaRPr lang="en-US" sz="1150" dirty="0"/>
           </a:p>

--- a/ai-case-library/research/ventures/grid-idea-island.pptx
+++ b/ai-case-library/research/ventures/grid-idea-island.pptx
@@ -2127,7 +2127,7 @@
                 <a:ea typeface="Arial" pitchFamily="34" charset="-122"/>
                 <a:cs typeface="Arial" pitchFamily="34" charset="-120"/>
               </a:rPr>
-              <a:t>гигаватт: столько собственной генерации ЦОД в США реально работает из заявленных (Cleanview, 2026). Тяжёлые турбины расписаны до 2031</a:t>
+              <a:t>гигаватт собственной генерации ЦОД в США реально работает из заявленных (Cleanview, 2026); тяжёлые турбины — до 2031</a:t>
             </a:r>
             <a:endParaRPr lang="en-US" sz="1300" dirty="0"/>
           </a:p>
@@ -2232,7 +2232,7 @@
                 <a:ea typeface="Arial" pitchFamily="34" charset="-122"/>
                 <a:cs typeface="Arial" pitchFamily="34" charset="-120"/>
               </a:rPr>
-              <a:t>новых мощностей дата-центров США до 2030 планируются с собственной генерацией (Enverus, BNEF). Oracle, Microsoft, Meta, xAI уже законтрактовали гигаватты</a:t>
+              <a:t>новых мощностей ЦОД США до 2030 — с собственной генерацией (Enverus, BNEF); Oracle, Microsoft, Meta, xAI уже законтрактовали гигаватты</a:t>
             </a:r>
             <a:endParaRPr lang="en-US" sz="1300" dirty="0"/>
           </a:p>
@@ -3361,7 +3361,7 @@
                 <a:ea typeface="Arial" pitchFamily="34" charset="-122"/>
                 <a:cs typeface="Arial" pitchFamily="34" charset="-120"/>
               </a:rPr>
-              <a:t>Перебирает конфигурации по слотам у производителей (поршни 2027–28, топливные элементы — месяцы) и очередям на трансформаторы; выбирает по сроку до энергии.</a:t>
+              <a:t>Перебирает конфигурации по реальным слотам у производителей и очередям на трансформаторы; выбирает по сроку до энергии.</a:t>
             </a:r>
             <a:endParaRPr lang="en-US" sz="1250" dirty="0"/>
           </a:p>

--- a/ai-case-library/research/ventures/grid-idea-island.pptx
+++ b/ai-case-library/research/ventures/grid-idea-island.pptx
@@ -2554,7 +2554,7 @@
       </p:sp>
       <p:pic>
         <p:nvPicPr>
-          <p:cNvPr id="7" name="Image 0" descr="/tmp/claude-0/-home-user/5ac64fc3-708b-5ba2-8575-a96a48f05f03/scratchpad/product/island.png">    </p:cNvPr>
+          <p:cNvPr id="7" name="Image 0" descr="_product/island.png">    </p:cNvPr>
           <p:cNvPicPr>
             <a:picLocks noChangeAspect="1"/>
           </p:cNvPicPr>
@@ -5998,7 +5998,7 @@
                 <a:ea typeface="Arial" pitchFamily="34" charset="-122"/>
                 <a:cs typeface="Arial" pitchFamily="34" charset="-120"/>
               </a:rPr>
-              <a:t>Этап 2 (следующий раунд, ориентир 20–30 млн $): инженерные фирмы с ИИ внутри — партнёрство или покупка, чтобы забирать весь проектный гонорар, а не долю. За такие фирмы стратеги платят по 445 тыс. $ за инженера (WSP → POWER).</a:t>
+              <a:t>Этап 2 (следующий раунд, ориентир 20–30 млн $): инженерные фирмы с ИИ внутри — партнёрство или покупка, чтобы забирать весь проектный гонорар, а не долю. Малые фирмы стоят 5–7 годовых прибылей; 445 тыс. $ за инженера (WSP → POWER) платят за масштаб, не за ИИ.</a:t>
             </a:r>
             <a:endParaRPr lang="en-US" sz="1300" dirty="0"/>
           </a:p>
@@ -6391,7 +6391,7 @@
                 <a:ea typeface="Arial" pitchFamily="34" charset="-122"/>
                 <a:cs typeface="Arial" pitchFamily="34" charset="-120"/>
               </a:rPr>
-              <a:t>1,78 млрд $ / 4000 сотрудников — WSP → POWER Engineers, 10.2024; 445 тыс. $ за инженера = 1,78 млрд / 4000. Спрос дата-центров 415 → 950 ТВт·ч — IEA. Black &amp; Veatch — вакансия 27.08.2026.</a:t>
+              <a:t>1,78 млрд $ / 4000 сотрудников — WSP → POWER Engineers, 10.2024; 445 тыс. $ за инженера = 1,78 млрд / 4000 (группа на 4000 человек); малые фирмы 5,4–7,5× EBITDA — ROG Partners, см. engineering-rollup-passport.md. Спрос дата-центров 415 → 950 ТВт·ч — IEA. Black &amp; Veatch — вакансия 27.08.2026.</a:t>
             </a:r>
             <a:endParaRPr lang="en-US" sz="1150" dirty="0"/>
           </a:p>
